--- a/dist/weeks-2학기/서비스디자인_2학기_04주차_공통요소와토큰.pptx
+++ b/dist/weeks-2학기/서비스디자인_2학기_04주차_공통요소와토큰.pptx
@@ -12752,7 +12752,7 @@
                 <a:ea typeface="Pretendard" pitchFamily="34" charset="-122"/>
                 <a:cs typeface="Pretendard" pitchFamily="34" charset="-120"/>
               </a:rPr>
-              <a:t>제출 — 다음 수업 시작 전까지 · Figma 링크 제출</a:t>
+              <a:t>제출 — 10월 7일(수) 수업 시작 전까지 · Figma 링크 제출</a:t>
             </a:r>
             <a:endParaRPr lang="en-US" sz="1200" dirty="0"/>
           </a:p>
